--- a/data/employees/EMP007/AST-EMP007-01.pptx
+++ b/data/employees/EMP007/AST-EMP007-01.pptx
@@ -9,6 +9,7 @@
     <p:sldId id="257" r:id="rId8"/>
     <p:sldId id="258" r:id="rId9"/>
     <p:sldId id="259" r:id="rId10"/>
+    <p:sldId id="260" r:id="rId11"/>
   </p:sldIdLst>
   <p:sldSz cx="9144000" cy="6858000" type="screen4x3"/>
   <p:notesSz cx="6858000" cy="9144000"/>
@@ -3098,42 +3099,55 @@
             <a:spLocks noGrp="1"/>
           </p:cNvSpPr>
           <p:nvPr>
-            <p:ph type="ctrTitle"/>
-          </p:nvPr>
-        </p:nvSpPr>
-        <p:spPr/>
-        <p:txBody>
-          <a:bodyPr/>
-          <a:lstStyle/>
-          <a:p>
-            <a:r>
-              <a:t>Project update deck - EMP007</a:t>
-            </a:r>
-          </a:p>
-        </p:txBody>
-      </p:sp>
-      <p:sp>
-        <p:nvSpPr>
-          <p:cNvPr id="3" name="Subtitle 2"/>
-          <p:cNvSpPr>
-            <a:spLocks noGrp="1"/>
-          </p:cNvSpPr>
-          <p:nvPr>
-            <p:ph type="subTitle" idx="1"/>
-          </p:nvPr>
-        </p:nvSpPr>
-        <p:spPr/>
-        <p:txBody>
-          <a:bodyPr/>
-          <a:lstStyle/>
-          <a:p>
-            <a:r>
-              <a:t>Riley Patel | Director | R&amp;D</a:t>
-            </a:r>
-          </a:p>
-          <a:p>
-            <a:r>
-              <a:t>Prepared: 2025-01-09</a:t>
+            <p:ph type="title"/>
+          </p:nvPr>
+        </p:nvSpPr>
+        <p:spPr/>
+        <p:txBody>
+          <a:bodyPr/>
+          <a:lstStyle/>
+          <a:p>
+            <a:r>
+              <a:t>Ast Emp007 01 - EMP007</a:t>
+            </a:r>
+          </a:p>
+        </p:txBody>
+      </p:sp>
+      <p:sp>
+        <p:nvSpPr>
+          <p:cNvPr id="3" name="Content Placeholder 2"/>
+          <p:cNvSpPr>
+            <a:spLocks noGrp="1"/>
+          </p:cNvSpPr>
+          <p:nvPr>
+            <p:ph idx="1"/>
+          </p:nvPr>
+        </p:nvSpPr>
+        <p:spPr/>
+        <p:txBody>
+          <a:bodyPr/>
+          <a:lstStyle/>
+          <a:p>
+            <a:r>
+              <a:t>Slide 1: Executive Summary</a:t>
+            </a:r>
+          </a:p>
+          <a:p>
+            <a:pPr lvl="1"/>
+            <a:r>
+              <a:t>Section 1: Customer escalation analysis. EMP007 contributes to ast emp007 01 through recurring collaboration, clear ownership boundaries, and measurable outcomes. The team captures decisions, open issues, and handoffs so that knowledge remains discoverable for future programs.</a:t>
+            </a:r>
+          </a:p>
+          <a:p>
+            <a:pPr lvl="1"/>
+            <a:r>
+              <a:t>Section 2: Quarterly delivery milestones. EMP007 contributes to ast emp007 01 through recurring collaboration, clear ownership boundaries, and measurable outcomes. The team captures decisions, open issues, and handoffs so that knowledge remains discoverable for future programs.</a:t>
+            </a:r>
+          </a:p>
+          <a:p>
+            <a:pPr lvl="1"/>
+            <a:r>
+              <a:t>Section 3: Quarterly delivery milestones. EMP007 contributes to ast emp007 01 through recurring collaboration, clear ownership boundaries, and measurable outcomes. The team captures decisions, open issues, and handoffs so that knowledge remains discoverable for future programs.</a:t>
             </a:r>
           </a:p>
         </p:txBody>
@@ -3172,7 +3186,7 @@
           <a:lstStyle/>
           <a:p>
             <a:r>
-              <a:t>Research Portfolio Status</a:t>
+              <a:t>Ast Emp007 01 - EMP007</a:t>
             </a:r>
           </a:p>
         </p:txBody>
@@ -3193,17 +3207,25 @@
           <a:lstStyle/>
           <a:p>
             <a:r>
-              <a:t>Overview of Research Portfolio Status for R&amp;D department.</a:t>
-            </a:r>
-          </a:p>
-          <a:p>
-            <a:r>
-              <a:t>Responsible: Riley Patel (Director)</a:t>
-            </a:r>
-          </a:p>
-          <a:p>
-            <a:r>
-              <a:t>Location: Austin | Skills: Python, Kusto, TypeScript, Synapse</a:t>
+              <a:t>Slide 2: Executive Summary</a:t>
+            </a:r>
+          </a:p>
+          <a:p>
+            <a:pPr lvl="1"/>
+            <a:r>
+              <a:t>Section 1: Knowledge transfer and onboarding. EMP007 contributes to ast emp007 01 through recurring collaboration, clear ownership boundaries, and measurable outcomes. The team captures decisions, open issues, and handoffs so that knowledge remains discoverable for future programs.</a:t>
+            </a:r>
+          </a:p>
+          <a:p>
+            <a:pPr lvl="1"/>
+            <a:r>
+              <a:t>Section 2: Automation backlog refinement. EMP007 contributes to ast emp007 01 through recurring collaboration, clear ownership boundaries, and measurable outcomes. The team captures decisions, open issues, and handoffs so that knowledge remains discoverable for future programs.</a:t>
+            </a:r>
+          </a:p>
+          <a:p>
+            <a:pPr lvl="1"/>
+            <a:r>
+              <a:t>Section 3: Data quality remediation. EMP007 contributes to ast emp007 01 through recurring collaboration, clear ownership boundaries, and measurable outcomes. The team captures decisions, open issues, and handoffs so that knowledge remains discoverable for future programs.</a:t>
             </a:r>
           </a:p>
         </p:txBody>
@@ -3242,7 +3264,7 @@
           <a:lstStyle/>
           <a:p>
             <a:r>
-              <a:t>IP Filing Pipeline</a:t>
+              <a:t>Ast Emp007 01 - EMP007</a:t>
             </a:r>
           </a:p>
         </p:txBody>
@@ -3263,17 +3285,25 @@
           <a:lstStyle/>
           <a:p>
             <a:r>
-              <a:t>Overview of IP Filing Pipeline for R&amp;D department.</a:t>
-            </a:r>
-          </a:p>
-          <a:p>
-            <a:r>
-              <a:t>Responsible: Riley Patel (Director)</a:t>
-            </a:r>
-          </a:p>
-          <a:p>
-            <a:r>
-              <a:t>Location: Austin | Skills: Python, Kusto, TypeScript, Synapse</a:t>
+              <a:t>Slide 3: Executive Summary</a:t>
+            </a:r>
+          </a:p>
+          <a:p>
+            <a:pPr lvl="1"/>
+            <a:r>
+              <a:t>Section 1: Data quality remediation. EMP007 contributes to ast emp007 01 through recurring collaboration, clear ownership boundaries, and measurable outcomes. The team captures decisions, open issues, and handoffs so that knowledge remains discoverable for future programs.</a:t>
+            </a:r>
+          </a:p>
+          <a:p>
+            <a:pPr lvl="1"/>
+            <a:r>
+              <a:t>Section 2: Department KPI performance. EMP007 contributes to ast emp007 01 through recurring collaboration, clear ownership boundaries, and measurable outcomes. The team captures decisions, open issues, and handoffs so that knowledge remains discoverable for future programs.</a:t>
+            </a:r>
+          </a:p>
+          <a:p>
+            <a:pPr lvl="1"/>
+            <a:r>
+              <a:t>Section 3: Department KPI performance. EMP007 contributes to ast emp007 01 through recurring collaboration, clear ownership boundaries, and measurable outcomes. The team captures decisions, open issues, and handoffs so that knowledge remains discoverable for future programs.</a:t>
             </a:r>
           </a:p>
         </p:txBody>
@@ -3312,7 +3342,7 @@
           <a:lstStyle/>
           <a:p>
             <a:r>
-              <a:t>Technology Readiness Levels</a:t>
+              <a:t>Ast Emp007 01 - EMP007</a:t>
             </a:r>
           </a:p>
         </p:txBody>
@@ -3333,17 +3363,103 @@
           <a:lstStyle/>
           <a:p>
             <a:r>
-              <a:t>Overview of Technology Readiness Levels for R&amp;D department.</a:t>
-            </a:r>
-          </a:p>
-          <a:p>
-            <a:r>
-              <a:t>Responsible: Riley Patel (Director)</a:t>
-            </a:r>
-          </a:p>
-          <a:p>
-            <a:r>
-              <a:t>Location: Austin | Skills: Python, Kusto, TypeScript, Synapse</a:t>
+              <a:t>Slide 4: Executive Summary</a:t>
+            </a:r>
+          </a:p>
+          <a:p>
+            <a:pPr lvl="1"/>
+            <a:r>
+              <a:t>Section 1: Operational risk review. EMP007 contributes to ast emp007 01 through recurring collaboration, clear ownership boundaries, and measurable outcomes. The team captures decisions, open issues, and handoffs so that knowledge remains discoverable for future programs.</a:t>
+            </a:r>
+          </a:p>
+          <a:p>
+            <a:pPr lvl="1"/>
+            <a:r>
+              <a:t>Section 2: Automation backlog refinement. EMP007 contributes to ast emp007 01 through recurring collaboration, clear ownership boundaries, and measurable outcomes. The team captures decisions, open issues, and handoffs so that knowledge remains discoverable for future programs.</a:t>
+            </a:r>
+          </a:p>
+          <a:p>
+            <a:pPr lvl="1"/>
+            <a:r>
+              <a:t>Section 3: Operational risk review. EMP007 contributes to ast emp007 01 through recurring collaboration, clear ownership boundaries, and measurable outcomes. The team captures decisions, open issues, and handoffs so that knowledge remains discoverable for future programs.</a:t>
+            </a:r>
+          </a:p>
+        </p:txBody>
+      </p:sp>
+    </p:spTree>
+  </p:cSld>
+  <p:clrMapOvr>
+    <a:masterClrMapping/>
+  </p:clrMapOvr>
+</p:sld>
+</file>
+
+<file path=ppt/slides/slide5.xml><?xml version="1.0" encoding="utf-8"?>
+<p:sld xmlns:a="http://schemas.openxmlformats.org/drawingml/2006/main" xmlns:p="http://schemas.openxmlformats.org/presentationml/2006/main" xmlns:r="http://schemas.openxmlformats.org/officeDocument/2006/relationships">
+  <p:cSld>
+    <p:spTree>
+      <p:nvGrpSpPr>
+        <p:cNvPr id="1" name=""/>
+        <p:cNvGrpSpPr/>
+        <p:nvPr/>
+      </p:nvGrpSpPr>
+      <p:grpSpPr/>
+      <p:sp>
+        <p:nvSpPr>
+          <p:cNvPr id="2" name="Title 1"/>
+          <p:cNvSpPr>
+            <a:spLocks noGrp="1"/>
+          </p:cNvSpPr>
+          <p:nvPr>
+            <p:ph type="title"/>
+          </p:nvPr>
+        </p:nvSpPr>
+        <p:spPr/>
+        <p:txBody>
+          <a:bodyPr/>
+          <a:lstStyle/>
+          <a:p>
+            <a:r>
+              <a:t>Ast Emp007 01 - EMP007</a:t>
+            </a:r>
+          </a:p>
+        </p:txBody>
+      </p:sp>
+      <p:sp>
+        <p:nvSpPr>
+          <p:cNvPr id="3" name="Content Placeholder 2"/>
+          <p:cNvSpPr>
+            <a:spLocks noGrp="1"/>
+          </p:cNvSpPr>
+          <p:nvPr>
+            <p:ph idx="1"/>
+          </p:nvPr>
+        </p:nvSpPr>
+        <p:spPr/>
+        <p:txBody>
+          <a:bodyPr/>
+          <a:lstStyle/>
+          <a:p>
+            <a:r>
+              <a:t>Slide 5: Executive Summary</a:t>
+            </a:r>
+          </a:p>
+          <a:p>
+            <a:pPr lvl="1"/>
+            <a:r>
+              <a:t>Section 1: Automation backlog refinement. EMP007 contributes to ast emp007 01 through recurring collaboration, clear ownership boundaries, and measurable outcomes. The team captures decisions, open issues, and handoffs so that knowledge remains discoverable for future programs.</a:t>
+            </a:r>
+          </a:p>
+          <a:p>
+            <a:pPr lvl="1"/>
+            <a:r>
+              <a:t>Section 2: Department KPI performance. EMP007 contributes to ast emp007 01 through recurring collaboration, clear ownership boundaries, and measurable outcomes. The team captures decisions, open issues, and handoffs so that knowledge remains discoverable for future programs.</a:t>
+            </a:r>
+          </a:p>
+          <a:p>
+            <a:pPr lvl="1"/>
+            <a:r>
+              <a:t>Section 3: Customer escalation analysis. EMP007 contributes to ast emp007 01 through recurring collaboration, clear ownership boundaries, and measurable outcomes. The team captures decisions, open issues, and handoffs so that knowledge remains discoverable for future programs.</a:t>
             </a:r>
           </a:p>
         </p:txBody>
